--- a/DOTE6751_LinkedIn/slides/LinkedIn_CN.pptx
+++ b/DOTE6751_LinkedIn/slides/LinkedIn_CN.pptx
@@ -14648,7 +14648,7 @@
                 <a:latin typeface="微软雅黑"/>
                 <a:ea typeface="微软雅黑"/>
               </a:rPr>
-              <a:t>业务查询 Q07–Q13 与结果留存脚本</a:t>
+              <a:t>查询层 Q01–Q13（查询类与业务分析）及结果留存脚本</a:t>
             </a:r>
           </a:p>
         </p:txBody>
@@ -14738,7 +14738,7 @@
                 </a:solidFill>
                 <a:latin typeface="Segoe UI"/>
               </a:rPr>
-              <a:t>11</a:t>
+              <a:t>12</a:t>
             </a:r>
           </a:p>
         </p:txBody>
@@ -15356,7 +15356,7 @@
                 <a:latin typeface="微软雅黑"/>
                 <a:ea typeface="微软雅黑"/>
               </a:rPr>
-              <a:t>验收：12 项检查、故障注入套件、一致性审计</a:t>
+              <a:t>验收：12 项检查与故障注入套件</a:t>
             </a:r>
           </a:p>
         </p:txBody>
@@ -15446,7 +15446,7 @@
                 </a:solidFill>
                 <a:latin typeface="Segoe UI"/>
               </a:rPr>
-              <a:t>9</a:t>
+              <a:t>10</a:t>
             </a:r>
           </a:p>
         </p:txBody>
@@ -15492,7 +15492,7 @@
                 <a:latin typeface="微软雅黑"/>
                 <a:ea typeface="微软雅黑"/>
               </a:rPr>
-              <a:t>合计 81 人时 · 人均 11.6 小时 · 没有低于难度 4 的任务 · 每位成员都评审过至少一份不是自己写的产物。</a:t>
+              <a:t>合计 83 人时 · 人均 11.9 小时 · 没有低于难度 4 的任务 · 每位成员都评审过至少一份不是自己写的产物。</a:t>
             </a:r>
           </a:p>
         </p:txBody>
@@ -15570,7 +15570,7 @@
                 <a:latin typeface="微软雅黑"/>
                 <a:ea typeface="微软雅黑"/>
               </a:rPr>
-              <a:t>81 小时</a:t>
+              <a:t>83 小时</a:t>
             </a:r>
           </a:p>
         </p:txBody>
